--- a/Presentation/Green5x5.pptx
+++ b/Presentation/Green5x5.pptx
@@ -10,7 +10,8 @@
     <p:sldId id="259" r:id="rId4"/>
     <p:sldId id="257" r:id="rId5"/>
     <p:sldId id="260" r:id="rId6"/>
-    <p:sldId id="261" r:id="rId7"/>
+    <p:sldId id="262" r:id="rId7"/>
+    <p:sldId id="261" r:id="rId8"/>
   </p:sldIdLst>
   <p:sldSz cx="12192000" cy="6858000"/>
   <p:notesSz cx="6858000" cy="9144000"/>
@@ -839,7 +840,7 @@
           <a:p>
             <a:fld id="{570EF447-7CD0-4DFA-9BB5-DBF6109B3DF9}" type="datetimeFigureOut">
               <a:rPr lang="en-US" smtClean="0"/>
-              <a:t>4/18/2026</a:t>
+              <a:t>4/19/2026</a:t>
             </a:fld>
             <a:endParaRPr lang="en-US"/>
           </a:p>
@@ -1090,7 +1091,7 @@
           <a:p>
             <a:fld id="{570EF447-7CD0-4DFA-9BB5-DBF6109B3DF9}" type="datetimeFigureOut">
               <a:rPr lang="en-US" smtClean="0"/>
-              <a:t>4/18/2026</a:t>
+              <a:t>4/19/2026</a:t>
             </a:fld>
             <a:endParaRPr lang="en-US"/>
           </a:p>
@@ -1404,7 +1405,7 @@
           <a:p>
             <a:fld id="{570EF447-7CD0-4DFA-9BB5-DBF6109B3DF9}" type="datetimeFigureOut">
               <a:rPr lang="en-US" smtClean="0"/>
-              <a:t>4/18/2026</a:t>
+              <a:t>4/19/2026</a:t>
             </a:fld>
             <a:endParaRPr lang="en-US"/>
           </a:p>
@@ -1745,7 +1746,7 @@
           <a:p>
             <a:fld id="{570EF447-7CD0-4DFA-9BB5-DBF6109B3DF9}" type="datetimeFigureOut">
               <a:rPr lang="en-US" smtClean="0"/>
-              <a:t>4/18/2026</a:t>
+              <a:t>4/19/2026</a:t>
             </a:fld>
             <a:endParaRPr lang="en-US"/>
           </a:p>
@@ -2059,7 +2060,7 @@
           <a:p>
             <a:fld id="{570EF447-7CD0-4DFA-9BB5-DBF6109B3DF9}" type="datetimeFigureOut">
               <a:rPr lang="en-US" smtClean="0"/>
-              <a:t>4/18/2026</a:t>
+              <a:t>4/19/2026</a:t>
             </a:fld>
             <a:endParaRPr lang="en-US"/>
           </a:p>
@@ -2452,7 +2453,7 @@
           <a:p>
             <a:fld id="{570EF447-7CD0-4DFA-9BB5-DBF6109B3DF9}" type="datetimeFigureOut">
               <a:rPr lang="en-US" smtClean="0"/>
-              <a:t>4/18/2026</a:t>
+              <a:t>4/19/2026</a:t>
             </a:fld>
             <a:endParaRPr lang="en-US"/>
           </a:p>
@@ -2622,7 +2623,7 @@
           <a:p>
             <a:fld id="{570EF447-7CD0-4DFA-9BB5-DBF6109B3DF9}" type="datetimeFigureOut">
               <a:rPr lang="en-US" smtClean="0"/>
-              <a:t>4/18/2026</a:t>
+              <a:t>4/19/2026</a:t>
             </a:fld>
             <a:endParaRPr lang="en-US"/>
           </a:p>
@@ -2802,7 +2803,7 @@
           <a:p>
             <a:fld id="{570EF447-7CD0-4DFA-9BB5-DBF6109B3DF9}" type="datetimeFigureOut">
               <a:rPr lang="en-US" smtClean="0"/>
-              <a:t>4/18/2026</a:t>
+              <a:t>4/19/2026</a:t>
             </a:fld>
             <a:endParaRPr lang="en-US"/>
           </a:p>
@@ -2978,7 +2979,7 @@
           <a:p>
             <a:fld id="{570EF447-7CD0-4DFA-9BB5-DBF6109B3DF9}" type="datetimeFigureOut">
               <a:rPr lang="en-US" smtClean="0"/>
-              <a:t>4/18/2026</a:t>
+              <a:t>4/19/2026</a:t>
             </a:fld>
             <a:endParaRPr lang="en-US"/>
           </a:p>
@@ -3225,7 +3226,7 @@
           <a:p>
             <a:fld id="{570EF447-7CD0-4DFA-9BB5-DBF6109B3DF9}" type="datetimeFigureOut">
               <a:rPr lang="en-US" smtClean="0"/>
-              <a:t>4/18/2026</a:t>
+              <a:t>4/19/2026</a:t>
             </a:fld>
             <a:endParaRPr lang="en-US"/>
           </a:p>
@@ -3457,7 +3458,7 @@
           <a:p>
             <a:fld id="{570EF447-7CD0-4DFA-9BB5-DBF6109B3DF9}" type="datetimeFigureOut">
               <a:rPr lang="en-US" smtClean="0"/>
-              <a:t>4/18/2026</a:t>
+              <a:t>4/19/2026</a:t>
             </a:fld>
             <a:endParaRPr lang="en-US"/>
           </a:p>
@@ -3831,7 +3832,7 @@
           <a:p>
             <a:fld id="{570EF447-7CD0-4DFA-9BB5-DBF6109B3DF9}" type="datetimeFigureOut">
               <a:rPr lang="en-US" smtClean="0"/>
-              <a:t>4/18/2026</a:t>
+              <a:t>4/19/2026</a:t>
             </a:fld>
             <a:endParaRPr lang="en-US"/>
           </a:p>
@@ -3954,7 +3955,7 @@
           <a:p>
             <a:fld id="{570EF447-7CD0-4DFA-9BB5-DBF6109B3DF9}" type="datetimeFigureOut">
               <a:rPr lang="en-US" smtClean="0"/>
-              <a:t>4/18/2026</a:t>
+              <a:t>4/19/2026</a:t>
             </a:fld>
             <a:endParaRPr lang="en-US"/>
           </a:p>
@@ -4049,7 +4050,7 @@
           <a:p>
             <a:fld id="{570EF447-7CD0-4DFA-9BB5-DBF6109B3DF9}" type="datetimeFigureOut">
               <a:rPr lang="en-US" smtClean="0"/>
-              <a:t>4/18/2026</a:t>
+              <a:t>4/19/2026</a:t>
             </a:fld>
             <a:endParaRPr lang="en-US"/>
           </a:p>
@@ -4304,7 +4305,7 @@
           <a:p>
             <a:fld id="{570EF447-7CD0-4DFA-9BB5-DBF6109B3DF9}" type="datetimeFigureOut">
               <a:rPr lang="en-US" smtClean="0"/>
-              <a:t>4/18/2026</a:t>
+              <a:t>4/19/2026</a:t>
             </a:fld>
             <a:endParaRPr lang="en-US"/>
           </a:p>
@@ -4567,7 +4568,7 @@
           <a:p>
             <a:fld id="{570EF447-7CD0-4DFA-9BB5-DBF6109B3DF9}" type="datetimeFigureOut">
               <a:rPr lang="en-US" smtClean="0"/>
-              <a:t>4/18/2026</a:t>
+              <a:t>4/19/2026</a:t>
             </a:fld>
             <a:endParaRPr lang="en-US"/>
           </a:p>
@@ -5310,7 +5311,7 @@
           <a:p>
             <a:fld id="{570EF447-7CD0-4DFA-9BB5-DBF6109B3DF9}" type="datetimeFigureOut">
               <a:rPr lang="en-US" smtClean="0"/>
-              <a:t>4/18/2026</a:t>
+              <a:t>4/19/2026</a:t>
             </a:fld>
             <a:endParaRPr lang="en-US"/>
           </a:p>
@@ -6802,7 +6803,7 @@
         <p:spPr>
           <a:xfrm>
             <a:off x="344040" y="252861"/>
-            <a:ext cx="6525472" cy="5262979"/>
+            <a:ext cx="6525472" cy="4955203"/>
           </a:xfrm>
           <a:prstGeom prst="rect">
             <a:avLst/>
@@ -6897,6 +6898,19 @@
             </a:r>
           </a:p>
           <a:p>
+            <a:pPr marL="285750" indent="-285750">
+              <a:buFont typeface="Wingdings" panose="05000000000000000000" pitchFamily="2" charset="2"/>
+              <a:buChar char="§"/>
+            </a:pPr>
+            <a:r>
+              <a:rPr lang="en-US" sz="2000" b="1" dirty="0">
+                <a:latin typeface="Arial" panose="020B0604020202020204" pitchFamily="34" charset="0"/>
+                <a:cs typeface="Arial" panose="020B0604020202020204" pitchFamily="34" charset="0"/>
+              </a:rPr>
+              <a:t>Scheduling an appointment now takes months</a:t>
+            </a:r>
+          </a:p>
+          <a:p>
             <a:endParaRPr lang="en-US" sz="2000" b="1" dirty="0">
               <a:latin typeface="Arial" panose="020B0604020202020204" pitchFamily="34" charset="0"/>
               <a:cs typeface="Arial" panose="020B0604020202020204" pitchFamily="34" charset="0"/>
@@ -6974,19 +6988,6 @@
               <a:latin typeface="Arial" panose="020B0604020202020204" pitchFamily="34" charset="0"/>
               <a:cs typeface="Arial" panose="020B0604020202020204" pitchFamily="34" charset="0"/>
             </a:endParaRPr>
-          </a:p>
-          <a:p>
-            <a:pPr marL="285750" indent="-285750">
-              <a:buFont typeface="Wingdings" panose="05000000000000000000" pitchFamily="2" charset="2"/>
-              <a:buChar char="§"/>
-            </a:pPr>
-            <a:r>
-              <a:rPr lang="en-US" sz="2000" b="1" dirty="0">
-                <a:latin typeface="Arial" panose="020B0604020202020204" pitchFamily="34" charset="0"/>
-                <a:cs typeface="Arial" panose="020B0604020202020204" pitchFamily="34" charset="0"/>
-              </a:rPr>
-              <a:t>State and county staff don’t have the right systems to help</a:t>
-            </a:r>
           </a:p>
         </p:txBody>
       </p:sp>
@@ -7029,6 +7030,48 @@
                 <a:cs typeface="Arial" panose="020B0604020202020204" pitchFamily="34" charset="0"/>
               </a:rPr>
               <a:t>Our web app makes it easier</a:t>
+            </a:r>
+          </a:p>
+        </p:txBody>
+      </p:sp>
+      <p:sp>
+        <p:nvSpPr>
+          <p:cNvPr id="6" name="TextBox 5">
+            <a:extLst>
+              <a:ext uri="{FF2B5EF4-FFF2-40B4-BE49-F238E27FC236}">
+                <a16:creationId xmlns:a16="http://schemas.microsoft.com/office/drawing/2014/main" id="{CA6925E8-264B-D0A8-C31E-645D04ECD041}"/>
+              </a:ext>
+            </a:extLst>
+          </p:cNvPr>
+          <p:cNvSpPr txBox="1"/>
+          <p:nvPr/>
+        </p:nvSpPr>
+        <p:spPr>
+          <a:xfrm>
+            <a:off x="344040" y="5008009"/>
+            <a:ext cx="8687418" cy="400110"/>
+          </a:xfrm>
+          <a:prstGeom prst="rect">
+            <a:avLst/>
+          </a:prstGeom>
+          <a:noFill/>
+        </p:spPr>
+        <p:txBody>
+          <a:bodyPr wrap="square" rtlCol="0">
+            <a:spAutoFit/>
+          </a:bodyPr>
+          <a:lstStyle/>
+          <a:p>
+            <a:pPr marL="285750" indent="-285750">
+              <a:buFont typeface="Wingdings" panose="05000000000000000000" pitchFamily="2" charset="2"/>
+              <a:buChar char="§"/>
+            </a:pPr>
+            <a:r>
+              <a:rPr lang="en-US" sz="2000" b="1" dirty="0">
+                <a:latin typeface="Arial" panose="020B0604020202020204" pitchFamily="34" charset="0"/>
+                <a:cs typeface="Arial" panose="020B0604020202020204" pitchFamily="34" charset="0"/>
+              </a:rPr>
+              <a:t>State and county staff don’t have the right systems to help</a:t>
             </a:r>
           </a:p>
         </p:txBody>
@@ -7153,6 +7196,78 @@
 </file>
 
 <file path=ppt/slides/slide6.xml><?xml version="1.0" encoding="utf-8"?>
+<p:sld xmlns:a="http://schemas.openxmlformats.org/drawingml/2006/main" xmlns:r="http://schemas.openxmlformats.org/officeDocument/2006/relationships" xmlns:p="http://schemas.openxmlformats.org/presentationml/2006/main">
+  <p:cSld>
+    <p:spTree>
+      <p:nvGrpSpPr>
+        <p:cNvPr id="1" name=""/>
+        <p:cNvGrpSpPr/>
+        <p:nvPr/>
+      </p:nvGrpSpPr>
+      <p:grpSpPr>
+        <a:xfrm>
+          <a:off x="0" y="0"/>
+          <a:ext cx="0" cy="0"/>
+          <a:chOff x="0" y="0"/>
+          <a:chExt cx="0" cy="0"/>
+        </a:xfrm>
+      </p:grpSpPr>
+      <p:sp>
+        <p:nvSpPr>
+          <p:cNvPr id="4" name="Title 1">
+            <a:extLst>
+              <a:ext uri="{FF2B5EF4-FFF2-40B4-BE49-F238E27FC236}">
+                <a16:creationId xmlns:a16="http://schemas.microsoft.com/office/drawing/2014/main" id="{6BD20849-C55F-1899-7128-D0EE28933579}"/>
+              </a:ext>
+            </a:extLst>
+          </p:cNvPr>
+          <p:cNvSpPr>
+            <a:spLocks noGrp="1"/>
+          </p:cNvSpPr>
+          <p:nvPr>
+            <p:ph type="title"/>
+          </p:nvPr>
+        </p:nvSpPr>
+        <p:spPr>
+          <a:xfrm>
+            <a:off x="2290040" y="2890316"/>
+            <a:ext cx="5137701" cy="742485"/>
+          </a:xfrm>
+        </p:spPr>
+        <p:txBody>
+          <a:bodyPr>
+            <a:normAutofit/>
+          </a:bodyPr>
+          <a:lstStyle/>
+          <a:p>
+            <a:pPr algn="ctr"/>
+            <a:r>
+              <a:rPr lang="en-US" b="1" dirty="0">
+                <a:solidFill>
+                  <a:schemeClr val="accent4">
+                    <a:lumMod val="75000"/>
+                  </a:schemeClr>
+                </a:solidFill>
+              </a:rPr>
+              <a:t>Insert Movie Here</a:t>
+            </a:r>
+          </a:p>
+        </p:txBody>
+      </p:sp>
+    </p:spTree>
+    <p:extLst>
+      <p:ext uri="{BB962C8B-B14F-4D97-AF65-F5344CB8AC3E}">
+        <p14:creationId xmlns:p14="http://schemas.microsoft.com/office/powerpoint/2010/main" val="3784796749"/>
+      </p:ext>
+    </p:extLst>
+  </p:cSld>
+  <p:clrMapOvr>
+    <a:masterClrMapping/>
+  </p:clrMapOvr>
+</p:sld>
+</file>
+
+<file path=ppt/slides/slide7.xml><?xml version="1.0" encoding="utf-8"?>
 <p:sld xmlns:a="http://schemas.openxmlformats.org/drawingml/2006/main" xmlns:r="http://schemas.openxmlformats.org/officeDocument/2006/relationships" xmlns:p="http://schemas.openxmlformats.org/presentationml/2006/main">
   <p:cSld>
     <p:spTree>

--- a/Presentation/Green5x5.pptx
+++ b/Presentation/Green5x5.pptx
@@ -10,8 +10,7 @@
     <p:sldId id="259" r:id="rId4"/>
     <p:sldId id="257" r:id="rId5"/>
     <p:sldId id="260" r:id="rId6"/>
-    <p:sldId id="262" r:id="rId7"/>
-    <p:sldId id="261" r:id="rId8"/>
+    <p:sldId id="261" r:id="rId7"/>
   </p:sldIdLst>
   <p:sldSz cx="12192000" cy="6858000"/>
   <p:notesSz cx="6858000" cy="9144000"/>
@@ -5853,6 +5852,15 @@
           <a:blip r:embed="rId2">
             <a:alphaModFix amt="42000"/>
             <a:extLst>
+              <a:ext uri="{BEBA8EAE-BF5A-486C-A8C5-ECC9F3942E4B}">
+                <a14:imgProps xmlns:a14="http://schemas.microsoft.com/office/drawing/2010/main">
+                  <a14:imgLayer r:embed="rId3">
+                    <a14:imgEffect>
+                      <a14:brightnessContrast bright="20000"/>
+                    </a14:imgEffect>
+                  </a14:imgLayer>
+                </a14:imgProps>
+              </a:ext>
               <a:ext uri="{28A0092B-C50C-407E-A947-70E740481C1C}">
                 <a14:useLocalDpi xmlns:a14="http://schemas.microsoft.com/office/drawing/2010/main" val="0"/>
               </a:ext>
@@ -5906,7 +5914,7 @@
         </p:nvSpPr>
         <p:spPr>
           <a:xfrm>
-            <a:off x="1524000" y="1888746"/>
+            <a:off x="1524000" y="3057674"/>
             <a:ext cx="9144000" cy="2127073"/>
           </a:xfrm>
         </p:spPr>
@@ -5920,20 +5928,36 @@
             <a:r>
               <a:rPr lang="en-US" sz="6600" b="1" dirty="0">
                 <a:solidFill>
-                  <a:srgbClr val="FFFF00"/>
-                </a:solidFill>
+                  <a:schemeClr val="bg1"/>
+                </a:solidFill>
+                <a:highlight>
+                  <a:srgbClr val="008000"/>
+                </a:highlight>
               </a:rPr>
-              <a:t>simpler </a:t>
+              <a:t>Simpler </a:t>
             </a:r>
             <a:r>
               <a:rPr lang="en-US" sz="6600" b="1" dirty="0">
                 <a:solidFill>
-                  <a:srgbClr val="FFFF00"/>
-                </a:solidFill>
+                  <a:schemeClr val="bg1"/>
+                </a:solidFill>
+                <a:highlight>
+                  <a:srgbClr val="008000"/>
+                </a:highlight>
                 <a:latin typeface="Arial" panose="020B0604020202020204" pitchFamily="34" charset="0"/>
                 <a:cs typeface="Arial" panose="020B0604020202020204" pitchFamily="34" charset="0"/>
               </a:rPr>
-              <a:t>USDA filings </a:t>
+              <a:t>USDA Filings</a:t>
+            </a:r>
+            <a:r>
+              <a:rPr lang="en-US" sz="6600" b="1" dirty="0">
+                <a:solidFill>
+                  <a:schemeClr val="bg1"/>
+                </a:solidFill>
+                <a:latin typeface="Arial" panose="020B0604020202020204" pitchFamily="34" charset="0"/>
+                <a:cs typeface="Arial" panose="020B0604020202020204" pitchFamily="34" charset="0"/>
+              </a:rPr>
+              <a:t> </a:t>
             </a:r>
             <a:br>
               <a:rPr lang="en-US" sz="6600" b="1" dirty="0">
@@ -5947,7 +5971,7 @@
             <a:r>
               <a:rPr lang="en-US" sz="4800" b="1" dirty="0">
                 <a:solidFill>
-                  <a:srgbClr val="FFFF00"/>
+                  <a:schemeClr val="bg1"/>
                 </a:solidFill>
                 <a:latin typeface="Arial" panose="020B0604020202020204" pitchFamily="34" charset="0"/>
                 <a:cs typeface="Arial" panose="020B0604020202020204" pitchFamily="34" charset="0"/>
@@ -5956,7 +5980,7 @@
             </a:r>
             <a:endParaRPr lang="en-US" sz="6600" b="1" dirty="0">
               <a:solidFill>
-                <a:srgbClr val="FFFF00"/>
+                <a:schemeClr val="bg1"/>
               </a:solidFill>
               <a:latin typeface="Arial" panose="020B0604020202020204" pitchFamily="34" charset="0"/>
               <a:cs typeface="Arial" panose="020B0604020202020204" pitchFamily="34" charset="0"/>
@@ -5978,8 +6002,8 @@
         </p:nvSpPr>
         <p:spPr>
           <a:xfrm>
-            <a:off x="4103971" y="5236177"/>
-            <a:ext cx="4321126" cy="1200329"/>
+            <a:off x="9281652" y="5311592"/>
+            <a:ext cx="2733368" cy="1200329"/>
           </a:xfrm>
           <a:prstGeom prst="rect">
             <a:avLst/>
@@ -6051,8 +6075,8 @@
         </p:nvSpPr>
         <p:spPr>
           <a:xfrm>
-            <a:off x="1524000" y="187465"/>
-            <a:ext cx="9144000" cy="1482900"/>
+            <a:off x="4464757" y="2071230"/>
+            <a:ext cx="3629320" cy="986444"/>
           </a:xfrm>
           <a:prstGeom prst="rect">
             <a:avLst/>
@@ -6060,7 +6084,7 @@
         </p:spPr>
         <p:txBody>
           <a:bodyPr vert="horz" lIns="91440" tIns="45720" rIns="91440" bIns="45720" rtlCol="0" anchor="b">
-            <a:normAutofit fontScale="97500"/>
+            <a:noAutofit/>
           </a:bodyPr>
           <a:lstStyle>
             <a:lvl1pPr algn="r" defTabSz="457200" rtl="0" eaLnBrk="1" latinLnBrk="0" hangingPunct="1">
@@ -6137,7 +6161,7 @@
           <a:p>
             <a:pPr algn="ctr"/>
             <a:r>
-              <a:rPr lang="en-US" sz="6800" b="1" dirty="0">
+              <a:rPr lang="en-US" sz="5200" b="1" dirty="0">
                 <a:solidFill>
                   <a:schemeClr val="accent2">
                     <a:lumMod val="75000"/>
@@ -6145,12 +6169,23 @@
                 </a:solidFill>
                 <a:latin typeface="Arial Rounded MT Bold" panose="020F0704030504030204" pitchFamily="34" charset="0"/>
               </a:rPr>
-              <a:t>green 5x5</a:t>
-            </a:r>
-            <a:endParaRPr lang="en-US" sz="4400" b="1" dirty="0">
+              <a:t>green</a:t>
+            </a:r>
+            <a:r>
+              <a:rPr lang="en-US" sz="5200" b="1" dirty="0">
+                <a:solidFill>
+                  <a:schemeClr val="accent2">
+                    <a:lumMod val="50000"/>
+                  </a:schemeClr>
+                </a:solidFill>
+                <a:latin typeface="Arial Rounded MT Bold" panose="020F0704030504030204" pitchFamily="34" charset="0"/>
+              </a:rPr>
+              <a:t>5x5</a:t>
+            </a:r>
+            <a:endParaRPr lang="en-US" sz="5200" b="1" dirty="0">
               <a:solidFill>
                 <a:schemeClr val="accent2">
-                  <a:lumMod val="75000"/>
+                  <a:lumMod val="50000"/>
                 </a:schemeClr>
               </a:solidFill>
               <a:latin typeface="Arial Rounded MT Bold" panose="020F0704030504030204" pitchFamily="34" charset="0"/>
@@ -6159,6 +6194,43 @@
           </a:p>
         </p:txBody>
       </p:sp>
+      <p:pic>
+        <p:nvPicPr>
+          <p:cNvPr id="6" name="Picture 5">
+            <a:extLst>
+              <a:ext uri="{FF2B5EF4-FFF2-40B4-BE49-F238E27FC236}">
+                <a16:creationId xmlns:a16="http://schemas.microsoft.com/office/drawing/2014/main" id="{2BA340D3-A874-1C09-BFF6-E9F7BBD9DD52}"/>
+              </a:ext>
+            </a:extLst>
+          </p:cNvPr>
+          <p:cNvPicPr>
+            <a:picLocks noChangeAspect="1"/>
+          </p:cNvPicPr>
+          <p:nvPr/>
+        </p:nvPicPr>
+        <p:blipFill>
+          <a:blip r:embed="rId4">
+            <a:extLst>
+              <a:ext uri="{28A0092B-C50C-407E-A947-70E740481C1C}">
+                <a14:useLocalDpi xmlns:a14="http://schemas.microsoft.com/office/drawing/2010/main" val="0"/>
+              </a:ext>
+            </a:extLst>
+          </a:blip>
+          <a:srcRect b="20078"/>
+          <a:stretch>
+            <a:fillRect/>
+          </a:stretch>
+        </p:blipFill>
+        <p:spPr>
+          <a:xfrm>
+            <a:off x="4920855" y="396220"/>
+            <a:ext cx="2701881" cy="2127073"/>
+          </a:xfrm>
+          <a:prstGeom prst="rect">
+            <a:avLst/>
+          </a:prstGeom>
+        </p:spPr>
+      </p:pic>
     </p:spTree>
     <p:extLst>
       <p:ext uri="{BB962C8B-B14F-4D97-AF65-F5344CB8AC3E}">
@@ -6223,13 +6295,14 @@
           </a:bodyPr>
           <a:lstStyle/>
           <a:p>
+            <a:pPr algn="r"/>
             <a:r>
               <a:rPr lang="en-US" sz="2800" b="1" dirty="0">
                 <a:solidFill>
                   <a:schemeClr val="bg1"/>
                 </a:solidFill>
               </a:rPr>
-              <a:t>GREENER 5X5 </a:t>
+              <a:t>green 5X5 </a:t>
             </a:r>
           </a:p>
         </p:txBody>
@@ -6550,13 +6623,14 @@
           </a:bodyPr>
           <a:lstStyle/>
           <a:p>
+            <a:pPr algn="r"/>
             <a:r>
               <a:rPr lang="en-US" sz="2800" b="1" dirty="0">
                 <a:solidFill>
                   <a:schemeClr val="bg1"/>
                 </a:solidFill>
               </a:rPr>
-              <a:t>GREENER 5X5 </a:t>
+              <a:t>green 5X5 </a:t>
             </a:r>
           </a:p>
         </p:txBody>
@@ -6777,13 +6851,14 @@
           </a:bodyPr>
           <a:lstStyle/>
           <a:p>
+            <a:pPr algn="r"/>
             <a:r>
               <a:rPr lang="en-US" sz="2800" b="1" dirty="0">
                 <a:solidFill>
                   <a:schemeClr val="bg1"/>
                 </a:solidFill>
               </a:rPr>
-              <a:t>GREENER 5X5 </a:t>
+              <a:t>green 5X5 </a:t>
             </a:r>
           </a:p>
         </p:txBody>
@@ -7200,78 +7275,6 @@
   <p:cSld>
     <p:spTree>
       <p:nvGrpSpPr>
-        <p:cNvPr id="1" name=""/>
-        <p:cNvGrpSpPr/>
-        <p:nvPr/>
-      </p:nvGrpSpPr>
-      <p:grpSpPr>
-        <a:xfrm>
-          <a:off x="0" y="0"/>
-          <a:ext cx="0" cy="0"/>
-          <a:chOff x="0" y="0"/>
-          <a:chExt cx="0" cy="0"/>
-        </a:xfrm>
-      </p:grpSpPr>
-      <p:sp>
-        <p:nvSpPr>
-          <p:cNvPr id="4" name="Title 1">
-            <a:extLst>
-              <a:ext uri="{FF2B5EF4-FFF2-40B4-BE49-F238E27FC236}">
-                <a16:creationId xmlns:a16="http://schemas.microsoft.com/office/drawing/2014/main" id="{6BD20849-C55F-1899-7128-D0EE28933579}"/>
-              </a:ext>
-            </a:extLst>
-          </p:cNvPr>
-          <p:cNvSpPr>
-            <a:spLocks noGrp="1"/>
-          </p:cNvSpPr>
-          <p:nvPr>
-            <p:ph type="title"/>
-          </p:nvPr>
-        </p:nvSpPr>
-        <p:spPr>
-          <a:xfrm>
-            <a:off x="2290040" y="2890316"/>
-            <a:ext cx="5137701" cy="742485"/>
-          </a:xfrm>
-        </p:spPr>
-        <p:txBody>
-          <a:bodyPr>
-            <a:normAutofit/>
-          </a:bodyPr>
-          <a:lstStyle/>
-          <a:p>
-            <a:pPr algn="ctr"/>
-            <a:r>
-              <a:rPr lang="en-US" b="1" dirty="0">
-                <a:solidFill>
-                  <a:schemeClr val="accent4">
-                    <a:lumMod val="75000"/>
-                  </a:schemeClr>
-                </a:solidFill>
-              </a:rPr>
-              <a:t>Insert Movie Here</a:t>
-            </a:r>
-          </a:p>
-        </p:txBody>
-      </p:sp>
-    </p:spTree>
-    <p:extLst>
-      <p:ext uri="{BB962C8B-B14F-4D97-AF65-F5344CB8AC3E}">
-        <p14:creationId xmlns:p14="http://schemas.microsoft.com/office/powerpoint/2010/main" val="3784796749"/>
-      </p:ext>
-    </p:extLst>
-  </p:cSld>
-  <p:clrMapOvr>
-    <a:masterClrMapping/>
-  </p:clrMapOvr>
-</p:sld>
-</file>
-
-<file path=ppt/slides/slide7.xml><?xml version="1.0" encoding="utf-8"?>
-<p:sld xmlns:a="http://schemas.openxmlformats.org/drawingml/2006/main" xmlns:r="http://schemas.openxmlformats.org/officeDocument/2006/relationships" xmlns:p="http://schemas.openxmlformats.org/presentationml/2006/main">
-  <p:cSld>
-    <p:spTree>
-      <p:nvGrpSpPr>
         <p:cNvPr id="1" name="">
           <a:extLst>
             <a:ext uri="{FF2B5EF4-FFF2-40B4-BE49-F238E27FC236}">
@@ -7318,13 +7321,14 @@
           </a:bodyPr>
           <a:lstStyle/>
           <a:p>
+            <a:pPr algn="r"/>
             <a:r>
               <a:rPr lang="en-US" sz="2800" b="1" dirty="0">
                 <a:solidFill>
                   <a:schemeClr val="bg1"/>
                 </a:solidFill>
               </a:rPr>
-              <a:t>GREEN 5X5 </a:t>
+              <a:t>green 5X5 </a:t>
             </a:r>
           </a:p>
         </p:txBody>

--- a/Presentation/Green5x5.pptx
+++ b/Presentation/Green5x5.pptx
@@ -6559,12 +6559,52 @@
           <a:chExt cx="0" cy="0"/>
         </a:xfrm>
       </p:grpSpPr>
+      <p:sp>
+        <p:nvSpPr>
+          <p:cNvPr id="2" name="Title 1">
+            <a:extLst>
+              <a:ext uri="{FF2B5EF4-FFF2-40B4-BE49-F238E27FC236}">
+                <a16:creationId xmlns:a16="http://schemas.microsoft.com/office/drawing/2014/main" id="{AF4CF346-E9D1-FDB1-B836-FAD0C7C3C5B3}"/>
+              </a:ext>
+            </a:extLst>
+          </p:cNvPr>
+          <p:cNvSpPr>
+            <a:spLocks noGrp="1"/>
+          </p:cNvSpPr>
+          <p:nvPr>
+            <p:ph type="title"/>
+          </p:nvPr>
+        </p:nvSpPr>
+        <p:spPr>
+          <a:xfrm rot="5400000">
+            <a:off x="10492340" y="4965976"/>
+            <a:ext cx="3003884" cy="347028"/>
+          </a:xfrm>
+        </p:spPr>
+        <p:txBody>
+          <a:bodyPr>
+            <a:normAutofit fontScale="90000"/>
+          </a:bodyPr>
+          <a:lstStyle/>
+          <a:p>
+            <a:pPr algn="r"/>
+            <a:r>
+              <a:rPr lang="en-US" sz="2800" b="1" dirty="0">
+                <a:solidFill>
+                  <a:schemeClr val="bg1"/>
+                </a:solidFill>
+              </a:rPr>
+              <a:t>green 5X5 </a:t>
+            </a:r>
+          </a:p>
+        </p:txBody>
+      </p:sp>
       <p:pic>
         <p:nvPicPr>
-          <p:cNvPr id="8" name="Picture 7">
+          <p:cNvPr id="6" name="Picture 5">
             <a:extLst>
               <a:ext uri="{FF2B5EF4-FFF2-40B4-BE49-F238E27FC236}">
-                <a16:creationId xmlns:a16="http://schemas.microsoft.com/office/drawing/2014/main" id="{91CA4B39-3911-047F-885B-6091853907ED}"/>
+                <a16:creationId xmlns:a16="http://schemas.microsoft.com/office/drawing/2014/main" id="{EC7A8B45-D904-5FDA-23D0-1815D6E73691}"/>
               </a:ext>
             </a:extLst>
           </p:cNvPr>
@@ -6587,83 +6627,7 @@
         </p:blipFill>
         <p:spPr>
           <a:xfrm>
-            <a:off x="1074363" y="485335"/>
-            <a:ext cx="7618008" cy="5887330"/>
-          </a:xfrm>
-          <a:prstGeom prst="rect">
-            <a:avLst/>
-          </a:prstGeom>
-        </p:spPr>
-      </p:pic>
-      <p:sp>
-        <p:nvSpPr>
-          <p:cNvPr id="2" name="Title 1">
-            <a:extLst>
-              <a:ext uri="{FF2B5EF4-FFF2-40B4-BE49-F238E27FC236}">
-                <a16:creationId xmlns:a16="http://schemas.microsoft.com/office/drawing/2014/main" id="{AF4CF346-E9D1-FDB1-B836-FAD0C7C3C5B3}"/>
-              </a:ext>
-            </a:extLst>
-          </p:cNvPr>
-          <p:cNvSpPr>
-            <a:spLocks noGrp="1"/>
-          </p:cNvSpPr>
-          <p:nvPr>
-            <p:ph type="title"/>
-          </p:nvPr>
-        </p:nvSpPr>
-        <p:spPr>
-          <a:xfrm rot="5400000">
-            <a:off x="10492340" y="4965976"/>
-            <a:ext cx="3003884" cy="347028"/>
-          </a:xfrm>
-        </p:spPr>
-        <p:txBody>
-          <a:bodyPr>
-            <a:normAutofit fontScale="90000"/>
-          </a:bodyPr>
-          <a:lstStyle/>
-          <a:p>
-            <a:pPr algn="r"/>
-            <a:r>
-              <a:rPr lang="en-US" sz="2800" b="1" dirty="0">
-                <a:solidFill>
-                  <a:schemeClr val="bg1"/>
-                </a:solidFill>
-              </a:rPr>
-              <a:t>green 5X5 </a:t>
-            </a:r>
-          </a:p>
-        </p:txBody>
-      </p:sp>
-      <p:pic>
-        <p:nvPicPr>
-          <p:cNvPr id="6" name="Picture 5">
-            <a:extLst>
-              <a:ext uri="{FF2B5EF4-FFF2-40B4-BE49-F238E27FC236}">
-                <a16:creationId xmlns:a16="http://schemas.microsoft.com/office/drawing/2014/main" id="{EC7A8B45-D904-5FDA-23D0-1815D6E73691}"/>
-              </a:ext>
-            </a:extLst>
-          </p:cNvPr>
-          <p:cNvPicPr>
-            <a:picLocks noChangeAspect="1"/>
-          </p:cNvPicPr>
-          <p:nvPr/>
-        </p:nvPicPr>
-        <p:blipFill>
-          <a:blip r:embed="rId3">
-            <a:extLst>
-              <a:ext uri="{28A0092B-C50C-407E-A947-70E740481C1C}">
-                <a14:useLocalDpi xmlns:a14="http://schemas.microsoft.com/office/drawing/2010/main" val="0"/>
-              </a:ext>
-            </a:extLst>
-          </a:blip>
-          <a:stretch>
-            <a:fillRect/>
-          </a:stretch>
-        </p:blipFill>
-        <p:spPr>
-          <a:xfrm>
-            <a:off x="1074363" y="485336"/>
+            <a:off x="1103078" y="353360"/>
             <a:ext cx="7534874" cy="5887329"/>
           </a:xfrm>
           <a:prstGeom prst="rect">
@@ -6681,81 +6645,6 @@
   <p:clrMapOvr>
     <a:masterClrMapping/>
   </p:clrMapOvr>
-  <p:timing>
-    <p:tnLst>
-      <p:par>
-        <p:cTn id="1" dur="indefinite" restart="never" nodeType="tmRoot">
-          <p:childTnLst>
-            <p:seq concurrent="1" nextAc="seek">
-              <p:cTn id="2" dur="indefinite" nodeType="mainSeq">
-                <p:childTnLst>
-                  <p:par>
-                    <p:cTn id="3" fill="hold">
-                      <p:stCondLst>
-                        <p:cond delay="indefinite"/>
-                      </p:stCondLst>
-                      <p:childTnLst>
-                        <p:par>
-                          <p:cTn id="4" fill="hold">
-                            <p:stCondLst>
-                              <p:cond delay="0"/>
-                            </p:stCondLst>
-                            <p:childTnLst>
-                              <p:par>
-                                <p:cTn id="5" presetID="1" presetClass="exit" presetSubtype="0" fill="hold" nodeType="clickEffect">
-                                  <p:stCondLst>
-                                    <p:cond delay="0"/>
-                                  </p:stCondLst>
-                                  <p:childTnLst>
-                                    <p:set>
-                                      <p:cBhvr>
-                                        <p:cTn id="6" dur="1" fill="hold">
-                                          <p:stCondLst>
-                                            <p:cond delay="0"/>
-                                          </p:stCondLst>
-                                        </p:cTn>
-                                        <p:tgtEl>
-                                          <p:spTgt spid="6"/>
-                                        </p:tgtEl>
-                                        <p:attrNameLst>
-                                          <p:attrName>style.visibility</p:attrName>
-                                        </p:attrNameLst>
-                                      </p:cBhvr>
-                                      <p:to>
-                                        <p:strVal val="hidden"/>
-                                      </p:to>
-                                    </p:set>
-                                  </p:childTnLst>
-                                </p:cTn>
-                              </p:par>
-                            </p:childTnLst>
-                          </p:cTn>
-                        </p:par>
-                      </p:childTnLst>
-                    </p:cTn>
-                  </p:par>
-                </p:childTnLst>
-              </p:cTn>
-              <p:prevCondLst>
-                <p:cond evt="onPrev" delay="0">
-                  <p:tgtEl>
-                    <p:sldTgt/>
-                  </p:tgtEl>
-                </p:cond>
-              </p:prevCondLst>
-              <p:nextCondLst>
-                <p:cond evt="onNext" delay="0">
-                  <p:tgtEl>
-                    <p:sldTgt/>
-                  </p:tgtEl>
-                </p:cond>
-              </p:nextCondLst>
-            </p:seq>
-          </p:childTnLst>
-        </p:cTn>
-      </p:par>
-    </p:tnLst>
-  </p:timing>
 </p:sld>
 </file>
 
